--- a/mechanismAccountFig.pptx
+++ b/mechanismAccountFig.pptx
@@ -105,6 +105,11 @@
       </a:defRPr>
     </a:lvl9pPr>
   </p:defaultTextStyle>
+  <p:extLst>
+    <p:ext uri="{EFAFB233-063F-42B5-8137-9DF3F51BA10A}">
+      <p15:sldGuideLst xmlns:p15="http://schemas.microsoft.com/office/powerpoint/2012/main"/>
+    </p:ext>
+  </p:extLst>
 </p:presentation>
 </file>
 
@@ -239,7 +244,7 @@
           <a:p>
             <a:fld id="{2FAE51D1-9768-4CEE-88EF-6000E2B70CB0}" type="datetimeFigureOut">
               <a:rPr lang="en-US" smtClean="0"/>
-              <a:t>10/7/2026</a:t>
+              <a:t>10/8/2026</a:t>
             </a:fld>
             <a:endParaRPr lang="en-US"/>
           </a:p>
@@ -409,7 +414,7 @@
           <a:p>
             <a:fld id="{2FAE51D1-9768-4CEE-88EF-6000E2B70CB0}" type="datetimeFigureOut">
               <a:rPr lang="en-US" smtClean="0"/>
-              <a:t>10/7/2026</a:t>
+              <a:t>10/8/2026</a:t>
             </a:fld>
             <a:endParaRPr lang="en-US"/>
           </a:p>
@@ -589,7 +594,7 @@
           <a:p>
             <a:fld id="{2FAE51D1-9768-4CEE-88EF-6000E2B70CB0}" type="datetimeFigureOut">
               <a:rPr lang="en-US" smtClean="0"/>
-              <a:t>10/7/2026</a:t>
+              <a:t>10/8/2026</a:t>
             </a:fld>
             <a:endParaRPr lang="en-US"/>
           </a:p>
@@ -759,7 +764,7 @@
           <a:p>
             <a:fld id="{2FAE51D1-9768-4CEE-88EF-6000E2B70CB0}" type="datetimeFigureOut">
               <a:rPr lang="en-US" smtClean="0"/>
-              <a:t>10/7/2026</a:t>
+              <a:t>10/8/2026</a:t>
             </a:fld>
             <a:endParaRPr lang="en-US"/>
           </a:p>
@@ -1005,7 +1010,7 @@
           <a:p>
             <a:fld id="{2FAE51D1-9768-4CEE-88EF-6000E2B70CB0}" type="datetimeFigureOut">
               <a:rPr lang="en-US" smtClean="0"/>
-              <a:t>10/7/2026</a:t>
+              <a:t>10/8/2026</a:t>
             </a:fld>
             <a:endParaRPr lang="en-US"/>
           </a:p>
@@ -1237,7 +1242,7 @@
           <a:p>
             <a:fld id="{2FAE51D1-9768-4CEE-88EF-6000E2B70CB0}" type="datetimeFigureOut">
               <a:rPr lang="en-US" smtClean="0"/>
-              <a:t>10/7/2026</a:t>
+              <a:t>10/8/2026</a:t>
             </a:fld>
             <a:endParaRPr lang="en-US"/>
           </a:p>
@@ -1604,7 +1609,7 @@
           <a:p>
             <a:fld id="{2FAE51D1-9768-4CEE-88EF-6000E2B70CB0}" type="datetimeFigureOut">
               <a:rPr lang="en-US" smtClean="0"/>
-              <a:t>10/7/2026</a:t>
+              <a:t>10/8/2026</a:t>
             </a:fld>
             <a:endParaRPr lang="en-US"/>
           </a:p>
@@ -1722,7 +1727,7 @@
           <a:p>
             <a:fld id="{2FAE51D1-9768-4CEE-88EF-6000E2B70CB0}" type="datetimeFigureOut">
               <a:rPr lang="en-US" smtClean="0"/>
-              <a:t>10/7/2026</a:t>
+              <a:t>10/8/2026</a:t>
             </a:fld>
             <a:endParaRPr lang="en-US"/>
           </a:p>
@@ -1817,7 +1822,7 @@
           <a:p>
             <a:fld id="{2FAE51D1-9768-4CEE-88EF-6000E2B70CB0}" type="datetimeFigureOut">
               <a:rPr lang="en-US" smtClean="0"/>
-              <a:t>10/7/2026</a:t>
+              <a:t>10/8/2026</a:t>
             </a:fld>
             <a:endParaRPr lang="en-US"/>
           </a:p>
@@ -2094,7 +2099,7 @@
           <a:p>
             <a:fld id="{2FAE51D1-9768-4CEE-88EF-6000E2B70CB0}" type="datetimeFigureOut">
               <a:rPr lang="en-US" smtClean="0"/>
-              <a:t>10/7/2026</a:t>
+              <a:t>10/8/2026</a:t>
             </a:fld>
             <a:endParaRPr lang="en-US"/>
           </a:p>
@@ -2351,7 +2356,7 @@
           <a:p>
             <a:fld id="{2FAE51D1-9768-4CEE-88EF-6000E2B70CB0}" type="datetimeFigureOut">
               <a:rPr lang="en-US" smtClean="0"/>
-              <a:t>10/7/2026</a:t>
+              <a:t>10/8/2026</a:t>
             </a:fld>
             <a:endParaRPr lang="en-US"/>
           </a:p>
@@ -2564,7 +2569,7 @@
           <a:p>
             <a:fld id="{2FAE51D1-9768-4CEE-88EF-6000E2B70CB0}" type="datetimeFigureOut">
               <a:rPr lang="en-US" smtClean="0"/>
-              <a:t>10/7/2026</a:t>
+              <a:t>10/8/2026</a:t>
             </a:fld>
             <a:endParaRPr lang="en-US"/>
           </a:p>
@@ -3063,7 +3068,7 @@
         </p:nvSpPr>
         <p:spPr>
           <a:xfrm>
-            <a:off x="-9464" y="2890730"/>
+            <a:off x="-9464" y="2505712"/>
             <a:ext cx="12192000" cy="1271161"/>
           </a:xfrm>
           <a:prstGeom prst="rect">
@@ -3120,7 +3125,7 @@
         </p:nvSpPr>
         <p:spPr>
           <a:xfrm>
-            <a:off x="-4015" y="5854795"/>
+            <a:off x="-4015" y="5301345"/>
             <a:ext cx="12192000" cy="1160600"/>
           </a:xfrm>
           <a:prstGeom prst="rect">
@@ -3191,7 +3196,7 @@
         </p:blipFill>
         <p:spPr>
           <a:xfrm>
-            <a:off x="1190605" y="210940"/>
+            <a:off x="1190605" y="6399"/>
             <a:ext cx="1530283" cy="1530283"/>
           </a:xfrm>
           <a:prstGeom prst="rect">
@@ -3213,7 +3218,7 @@
         </p:nvSpPr>
         <p:spPr>
           <a:xfrm>
-            <a:off x="3819784" y="808438"/>
+            <a:off x="3819784" y="423421"/>
             <a:ext cx="739708" cy="723971"/>
           </a:xfrm>
           <a:prstGeom prst="cube">
@@ -3965,7 +3970,7 @@
         </p:nvSpPr>
         <p:spPr>
           <a:xfrm>
-            <a:off x="6062472" y="2103397"/>
+            <a:off x="6062472" y="1946984"/>
             <a:ext cx="173736" cy="173736"/>
           </a:xfrm>
           <a:prstGeom prst="rect">
@@ -4019,7 +4024,7 @@
         </p:nvSpPr>
         <p:spPr>
           <a:xfrm>
-            <a:off x="6717792" y="2103397"/>
+            <a:off x="6717792" y="1946984"/>
             <a:ext cx="173736" cy="173736"/>
           </a:xfrm>
           <a:prstGeom prst="rect">
@@ -4071,7 +4076,7 @@
         </p:nvSpPr>
         <p:spPr>
           <a:xfrm>
-            <a:off x="5870448" y="1850795"/>
+            <a:off x="5870448" y="1694382"/>
             <a:ext cx="1444752" cy="691515"/>
           </a:xfrm>
           <a:prstGeom prst="rect">
@@ -4118,7 +4123,7 @@
         </p:nvSpPr>
         <p:spPr>
           <a:xfrm>
-            <a:off x="7732776" y="2103397"/>
+            <a:off x="7732776" y="1946984"/>
             <a:ext cx="173736" cy="173736"/>
           </a:xfrm>
           <a:prstGeom prst="rect">
@@ -4172,7 +4177,7 @@
         </p:nvSpPr>
         <p:spPr>
           <a:xfrm>
-            <a:off x="8159496" y="2103397"/>
+            <a:off x="8159496" y="1946984"/>
             <a:ext cx="173736" cy="173736"/>
           </a:xfrm>
           <a:prstGeom prst="rect">
@@ -4224,7 +4229,7 @@
         </p:nvSpPr>
         <p:spPr>
           <a:xfrm>
-            <a:off x="7312152" y="1850795"/>
+            <a:off x="7312152" y="1694382"/>
             <a:ext cx="1444752" cy="691515"/>
           </a:xfrm>
           <a:prstGeom prst="rect">
@@ -4273,7 +4278,7 @@
         </p:nvCxnSpPr>
         <p:spPr>
           <a:xfrm>
-            <a:off x="7668768" y="1966237"/>
+            <a:off x="7668768" y="1809824"/>
             <a:ext cx="332232" cy="0"/>
           </a:xfrm>
           <a:prstGeom prst="straightConnector1">
@@ -4315,7 +4320,7 @@
         </p:nvSpPr>
         <p:spPr>
           <a:xfrm>
-            <a:off x="9348216" y="2103397"/>
+            <a:off x="9348216" y="1946984"/>
             <a:ext cx="173736" cy="173736"/>
           </a:xfrm>
           <a:prstGeom prst="rect">
@@ -4369,7 +4374,7 @@
         </p:nvSpPr>
         <p:spPr>
           <a:xfrm>
-            <a:off x="9610344" y="2103397"/>
+            <a:off x="9610344" y="1946984"/>
             <a:ext cx="173736" cy="173736"/>
           </a:xfrm>
           <a:prstGeom prst="rect">
@@ -4421,7 +4426,7 @@
         </p:nvSpPr>
         <p:spPr>
           <a:xfrm>
-            <a:off x="8763000" y="1850795"/>
+            <a:off x="8763000" y="1694382"/>
             <a:ext cx="1444752" cy="691515"/>
           </a:xfrm>
           <a:prstGeom prst="rect">
@@ -4468,7 +4473,7 @@
         </p:nvSpPr>
         <p:spPr>
           <a:xfrm>
-            <a:off x="10872216" y="2103397"/>
+            <a:off x="10872216" y="1946984"/>
             <a:ext cx="173736" cy="173736"/>
           </a:xfrm>
           <a:prstGeom prst="rect">
@@ -4522,7 +4527,7 @@
         </p:nvSpPr>
         <p:spPr>
           <a:xfrm>
-            <a:off x="11225784" y="2103397"/>
+            <a:off x="11225784" y="1946984"/>
             <a:ext cx="173736" cy="173736"/>
           </a:xfrm>
           <a:prstGeom prst="rect">
@@ -4574,7 +4579,7 @@
         </p:nvSpPr>
         <p:spPr>
           <a:xfrm>
-            <a:off x="10204704" y="1850795"/>
+            <a:off x="10204704" y="1694382"/>
             <a:ext cx="1444752" cy="691515"/>
           </a:xfrm>
           <a:prstGeom prst="rect">
@@ -4623,7 +4628,7 @@
         </p:nvCxnSpPr>
         <p:spPr>
           <a:xfrm>
-            <a:off x="11158728" y="1987573"/>
+            <a:off x="11158728" y="1831160"/>
             <a:ext cx="332232" cy="0"/>
           </a:xfrm>
           <a:prstGeom prst="straightConnector1">
@@ -4665,7 +4670,7 @@
         </p:nvSpPr>
         <p:spPr>
           <a:xfrm>
-            <a:off x="795212" y="1713761"/>
+            <a:off x="795212" y="1509220"/>
             <a:ext cx="2495748" cy="923330"/>
           </a:xfrm>
           <a:prstGeom prst="rect">
@@ -4703,7 +4708,7 @@
         </p:nvSpPr>
         <p:spPr>
           <a:xfrm>
-            <a:off x="3321817" y="1714094"/>
+            <a:off x="3321817" y="1509553"/>
             <a:ext cx="2231226" cy="923330"/>
           </a:xfrm>
           <a:prstGeom prst="rect">
@@ -4787,7 +4792,7 @@
         </p:blipFill>
         <p:spPr>
           <a:xfrm>
-            <a:off x="3047578" y="3163826"/>
+            <a:off x="3047578" y="2670531"/>
             <a:ext cx="2731433" cy="354232"/>
           </a:xfrm>
           <a:prstGeom prst="rect">
@@ -4817,7 +4822,7 @@
         </p:blipFill>
         <p:spPr>
           <a:xfrm>
-            <a:off x="3038432" y="3712795"/>
+            <a:off x="3038432" y="3219500"/>
             <a:ext cx="2740578" cy="371966"/>
           </a:xfrm>
           <a:prstGeom prst="rect">
@@ -4853,7 +4858,7 @@
         </p:blipFill>
         <p:spPr>
           <a:xfrm>
-            <a:off x="1394988" y="3039708"/>
+            <a:off x="1394988" y="2546413"/>
             <a:ext cx="1092183" cy="1092183"/>
           </a:xfrm>
           <a:prstGeom prst="rect">
@@ -4875,7 +4880,7 @@
         </p:nvSpPr>
         <p:spPr>
           <a:xfrm>
-            <a:off x="7219684" y="3297248"/>
+            <a:off x="7219684" y="2828016"/>
             <a:ext cx="614606" cy="601531"/>
           </a:xfrm>
           <a:prstGeom prst="cube">
@@ -4935,7 +4940,7 @@
         </p:blipFill>
         <p:spPr>
           <a:xfrm>
-            <a:off x="8563332" y="3429331"/>
+            <a:off x="8563332" y="2960099"/>
             <a:ext cx="2731433" cy="354232"/>
           </a:xfrm>
           <a:prstGeom prst="rect">
@@ -4965,7 +4970,7 @@
         </p:blipFill>
         <p:spPr>
           <a:xfrm>
-            <a:off x="3047578" y="6007076"/>
+            <a:off x="3047578" y="5477682"/>
             <a:ext cx="2731433" cy="354232"/>
           </a:xfrm>
           <a:prstGeom prst="rect">
@@ -4995,7 +5000,7 @@
         </p:blipFill>
         <p:spPr>
           <a:xfrm>
-            <a:off x="3038432" y="6556045"/>
+            <a:off x="3038432" y="6026651"/>
             <a:ext cx="2740578" cy="371966"/>
           </a:xfrm>
           <a:prstGeom prst="rect">
@@ -5031,7 +5036,7 @@
         </p:blipFill>
         <p:spPr>
           <a:xfrm>
-            <a:off x="1394988" y="5882958"/>
+            <a:off x="1394988" y="5353564"/>
             <a:ext cx="1092183" cy="1092183"/>
           </a:xfrm>
           <a:prstGeom prst="rect">
@@ -5056,13 +5061,13 @@
         </p:nvCxnSpPr>
         <p:spPr>
           <a:xfrm flipV="1">
-            <a:off x="2121411" y="6184193"/>
+            <a:off x="2121411" y="5654799"/>
             <a:ext cx="926167" cy="470135"/>
           </a:xfrm>
           <a:prstGeom prst="straightConnector1">
             <a:avLst/>
           </a:prstGeom>
-          <a:ln w="57150">
+          <a:ln w="69850">
             <a:solidFill>
               <a:schemeClr val="tx1"/>
             </a:solidFill>
@@ -5102,13 +5107,13 @@
         </p:nvCxnSpPr>
         <p:spPr>
           <a:xfrm flipV="1">
-            <a:off x="2121410" y="6742028"/>
+            <a:off x="2121410" y="6212634"/>
             <a:ext cx="917022" cy="40356"/>
           </a:xfrm>
           <a:prstGeom prst="straightConnector1">
             <a:avLst/>
           </a:prstGeom>
-          <a:ln w="57150">
+          <a:ln w="69850">
             <a:solidFill>
               <a:schemeClr val="tx1"/>
             </a:solidFill>
@@ -5145,7 +5150,7 @@
         </p:nvSpPr>
         <p:spPr>
           <a:xfrm>
-            <a:off x="7216636" y="6056174"/>
+            <a:off x="7216636" y="5526780"/>
             <a:ext cx="614606" cy="601531"/>
           </a:xfrm>
           <a:prstGeom prst="cube">
@@ -5205,7 +5210,7 @@
         </p:blipFill>
         <p:spPr>
           <a:xfrm>
-            <a:off x="8560284" y="6188257"/>
+            <a:off x="8560284" y="5658863"/>
             <a:ext cx="2731433" cy="354232"/>
           </a:xfrm>
           <a:prstGeom prst="rect">
@@ -5229,13 +5234,13 @@
         </p:nvCxnSpPr>
         <p:spPr>
           <a:xfrm flipV="1">
-            <a:off x="7914745" y="6365374"/>
+            <a:off x="7914745" y="5835980"/>
             <a:ext cx="627251" cy="785"/>
           </a:xfrm>
           <a:prstGeom prst="straightConnector1">
             <a:avLst/>
           </a:prstGeom>
-          <a:ln w="57150">
+          <a:ln w="69850">
             <a:solidFill>
               <a:schemeClr val="tx1"/>
             </a:solidFill>
@@ -5280,7 +5285,7 @@
         </p:blipFill>
         <p:spPr>
           <a:xfrm>
-            <a:off x="3053674" y="4526123"/>
+            <a:off x="3053674" y="4008763"/>
             <a:ext cx="2731433" cy="354232"/>
           </a:xfrm>
           <a:prstGeom prst="rect">
@@ -5310,7 +5315,7 @@
         </p:blipFill>
         <p:spPr>
           <a:xfrm>
-            <a:off x="3044528" y="5075092"/>
+            <a:off x="3044528" y="4557732"/>
             <a:ext cx="2740578" cy="371966"/>
           </a:xfrm>
           <a:prstGeom prst="rect">
@@ -5346,7 +5351,7 @@
         </p:blipFill>
         <p:spPr>
           <a:xfrm>
-            <a:off x="1401084" y="4402005"/>
+            <a:off x="1401084" y="3884645"/>
             <a:ext cx="1092183" cy="1092183"/>
           </a:xfrm>
           <a:prstGeom prst="rect">
@@ -5371,13 +5376,13 @@
         </p:nvCxnSpPr>
         <p:spPr>
           <a:xfrm flipV="1">
-            <a:off x="2127507" y="4703240"/>
+            <a:off x="2127507" y="4185880"/>
             <a:ext cx="926167" cy="470135"/>
           </a:xfrm>
           <a:prstGeom prst="straightConnector1">
             <a:avLst/>
           </a:prstGeom>
-          <a:ln w="9525">
+          <a:ln w="38100">
             <a:solidFill>
               <a:schemeClr val="tx1"/>
             </a:solidFill>
@@ -5417,13 +5422,13 @@
         </p:nvCxnSpPr>
         <p:spPr>
           <a:xfrm flipV="1">
-            <a:off x="2127506" y="5261075"/>
+            <a:off x="2127506" y="4743715"/>
             <a:ext cx="917022" cy="40356"/>
           </a:xfrm>
           <a:prstGeom prst="straightConnector1">
             <a:avLst/>
           </a:prstGeom>
-          <a:ln w="9525">
+          <a:ln w="38100">
             <a:solidFill>
               <a:schemeClr val="tx1"/>
             </a:solidFill>
@@ -5460,7 +5465,7 @@
         </p:nvSpPr>
         <p:spPr>
           <a:xfrm>
-            <a:off x="7225780" y="4659545"/>
+            <a:off x="7225780" y="4142185"/>
             <a:ext cx="614606" cy="601531"/>
           </a:xfrm>
           <a:prstGeom prst="cube">
@@ -5520,7 +5525,7 @@
         </p:blipFill>
         <p:spPr>
           <a:xfrm>
-            <a:off x="8569428" y="4791628"/>
+            <a:off x="8569428" y="4274268"/>
             <a:ext cx="2731433" cy="354232"/>
           </a:xfrm>
           <a:prstGeom prst="rect">
@@ -5544,13 +5549,13 @@
         </p:nvCxnSpPr>
         <p:spPr>
           <a:xfrm flipV="1">
-            <a:off x="7923889" y="4968745"/>
+            <a:off x="7923889" y="4451385"/>
             <a:ext cx="627251" cy="785"/>
           </a:xfrm>
           <a:prstGeom prst="straightConnector1">
             <a:avLst/>
           </a:prstGeom>
-          <a:ln w="9525">
+          <a:ln w="38100">
             <a:solidFill>
               <a:schemeClr val="tx1"/>
             </a:solidFill>
@@ -5587,7 +5592,7 @@
         </p:nvSpPr>
         <p:spPr>
           <a:xfrm>
-            <a:off x="4592560" y="1216376"/>
+            <a:off x="4592560" y="1084024"/>
             <a:ext cx="8260567" cy="646331"/>
           </a:xfrm>
           <a:prstGeom prst="rect">
@@ -5647,8 +5652,8 @@
         </p:blipFill>
         <p:spPr>
           <a:xfrm>
-            <a:off x="7205243" y="7503374"/>
-            <a:ext cx="1066949" cy="1095528"/>
+            <a:off x="4582351" y="7178514"/>
+            <a:ext cx="1287682" cy="1322173"/>
           </a:xfrm>
           <a:prstGeom prst="rect">
             <a:avLst/>
@@ -5677,7 +5682,7 @@
         </p:blipFill>
         <p:spPr>
           <a:xfrm>
-            <a:off x="2614446" y="8014296"/>
+            <a:off x="24682" y="8274043"/>
             <a:ext cx="3832794" cy="610803"/>
           </a:xfrm>
           <a:prstGeom prst="rect">
@@ -5687,10 +5692,415 @@
       </p:pic>
       <p:sp>
         <p:nvSpPr>
-          <p:cNvPr id="119" name="Thought Bubble: Cloud 118">
-            <a:extLst>
-              <a:ext uri="{FF2B5EF4-FFF2-40B4-BE49-F238E27FC236}">
-                <a16:creationId xmlns:a16="http://schemas.microsoft.com/office/drawing/2014/main" id="{34BE1FE3-99AB-A0FD-D7F4-0315C2295095}"/>
+          <p:cNvPr id="121" name="TextBox 120">
+            <a:extLst>
+              <a:ext uri="{FF2B5EF4-FFF2-40B4-BE49-F238E27FC236}">
+                <a16:creationId xmlns:a16="http://schemas.microsoft.com/office/drawing/2014/main" id="{99AB9629-DF22-17FA-65A0-AEB2000F2B48}"/>
+              </a:ext>
+            </a:extLst>
+          </p:cNvPr>
+          <p:cNvSpPr txBox="1"/>
+          <p:nvPr/>
+        </p:nvSpPr>
+        <p:spPr>
+          <a:xfrm>
+            <a:off x="-73692" y="-90007"/>
+            <a:ext cx="2078923" cy="707886"/>
+          </a:xfrm>
+          <a:prstGeom prst="rect">
+            <a:avLst/>
+          </a:prstGeom>
+          <a:noFill/>
+        </p:spPr>
+        <p:txBody>
+          <a:bodyPr wrap="square" rtlCol="0">
+            <a:spAutoFit/>
+          </a:bodyPr>
+          <a:lstStyle/>
+          <a:p>
+            <a:r>
+              <a:rPr lang="en-US" sz="4000" dirty="0">
+                <a:latin typeface="Times New Roman" panose="02020603050405020304" pitchFamily="18" charset="0"/>
+                <a:cs typeface="Times New Roman" panose="02020603050405020304" pitchFamily="18" charset="0"/>
+              </a:rPr>
+              <a:t>(A)</a:t>
+            </a:r>
+          </a:p>
+        </p:txBody>
+      </p:sp>
+      <p:sp>
+        <p:nvSpPr>
+          <p:cNvPr id="123" name="TextBox 122">
+            <a:extLst>
+              <a:ext uri="{FF2B5EF4-FFF2-40B4-BE49-F238E27FC236}">
+                <a16:creationId xmlns:a16="http://schemas.microsoft.com/office/drawing/2014/main" id="{8CA00D84-DE53-10BF-87BB-2224E52316F0}"/>
+              </a:ext>
+            </a:extLst>
+          </p:cNvPr>
+          <p:cNvSpPr txBox="1"/>
+          <p:nvPr/>
+        </p:nvSpPr>
+        <p:spPr>
+          <a:xfrm>
+            <a:off x="-86249" y="2495286"/>
+            <a:ext cx="2078923" cy="707886"/>
+          </a:xfrm>
+          <a:prstGeom prst="rect">
+            <a:avLst/>
+          </a:prstGeom>
+          <a:noFill/>
+        </p:spPr>
+        <p:txBody>
+          <a:bodyPr wrap="square" rtlCol="0">
+            <a:spAutoFit/>
+          </a:bodyPr>
+          <a:lstStyle/>
+          <a:p>
+            <a:r>
+              <a:rPr lang="en-US" sz="4000" dirty="0">
+                <a:latin typeface="Times New Roman" panose="02020603050405020304" pitchFamily="18" charset="0"/>
+                <a:cs typeface="Times New Roman" panose="02020603050405020304" pitchFamily="18" charset="0"/>
+              </a:rPr>
+              <a:t>(B)</a:t>
+            </a:r>
+          </a:p>
+        </p:txBody>
+      </p:sp>
+      <p:sp>
+        <p:nvSpPr>
+          <p:cNvPr id="127" name="TextBox 126">
+            <a:extLst>
+              <a:ext uri="{FF2B5EF4-FFF2-40B4-BE49-F238E27FC236}">
+                <a16:creationId xmlns:a16="http://schemas.microsoft.com/office/drawing/2014/main" id="{7E8A405A-8294-FF79-22DA-E4479FE9C71C}"/>
+              </a:ext>
+            </a:extLst>
+          </p:cNvPr>
+          <p:cNvSpPr txBox="1"/>
+          <p:nvPr/>
+        </p:nvSpPr>
+        <p:spPr>
+          <a:xfrm>
+            <a:off x="-90262" y="6399031"/>
+            <a:ext cx="2078923" cy="707886"/>
+          </a:xfrm>
+          <a:prstGeom prst="rect">
+            <a:avLst/>
+          </a:prstGeom>
+          <a:noFill/>
+        </p:spPr>
+        <p:txBody>
+          <a:bodyPr wrap="square" rtlCol="0">
+            <a:spAutoFit/>
+          </a:bodyPr>
+          <a:lstStyle/>
+          <a:p>
+            <a:r>
+              <a:rPr lang="en-US" sz="4000" dirty="0">
+                <a:latin typeface="Times New Roman" panose="02020603050405020304" pitchFamily="18" charset="0"/>
+                <a:cs typeface="Times New Roman" panose="02020603050405020304" pitchFamily="18" charset="0"/>
+              </a:rPr>
+              <a:t>(C)</a:t>
+            </a:r>
+          </a:p>
+        </p:txBody>
+      </p:sp>
+      <p:cxnSp>
+        <p:nvCxnSpPr>
+          <p:cNvPr id="136" name="Straight Arrow Connector 135">
+            <a:extLst>
+              <a:ext uri="{FF2B5EF4-FFF2-40B4-BE49-F238E27FC236}">
+                <a16:creationId xmlns:a16="http://schemas.microsoft.com/office/drawing/2014/main" id="{343FFED4-E899-E374-4A2D-52023D419B3C}"/>
+              </a:ext>
+            </a:extLst>
+          </p:cNvPr>
+          <p:cNvCxnSpPr>
+            <a:cxnSpLocks/>
+          </p:cNvCxnSpPr>
+          <p:nvPr/>
+        </p:nvCxnSpPr>
+        <p:spPr>
+          <a:xfrm flipH="1">
+            <a:off x="733015" y="2562235"/>
+            <a:ext cx="12263" cy="3836382"/>
+          </a:xfrm>
+          <a:prstGeom prst="straightConnector1">
+            <a:avLst/>
+          </a:prstGeom>
+          <a:ln w="28575">
+            <a:solidFill>
+              <a:schemeClr val="tx1"/>
+            </a:solidFill>
+            <a:tailEnd type="triangle"/>
+          </a:ln>
+        </p:spPr>
+        <p:style>
+          <a:lnRef idx="2">
+            <a:schemeClr val="accent1"/>
+          </a:lnRef>
+          <a:fillRef idx="0">
+            <a:schemeClr val="accent1"/>
+          </a:fillRef>
+          <a:effectRef idx="1">
+            <a:schemeClr val="accent1"/>
+          </a:effectRef>
+          <a:fontRef idx="minor">
+            <a:schemeClr val="tx1"/>
+          </a:fontRef>
+        </p:style>
+      </p:cxnSp>
+      <p:sp>
+        <p:nvSpPr>
+          <p:cNvPr id="139" name="TextBox 138">
+            <a:extLst>
+              <a:ext uri="{FF2B5EF4-FFF2-40B4-BE49-F238E27FC236}">
+                <a16:creationId xmlns:a16="http://schemas.microsoft.com/office/drawing/2014/main" id="{5BD3A7C3-7D1A-8704-BD39-4DB4579A4C7C}"/>
+              </a:ext>
+            </a:extLst>
+          </p:cNvPr>
+          <p:cNvSpPr txBox="1"/>
+          <p:nvPr/>
+        </p:nvSpPr>
+        <p:spPr>
+          <a:xfrm rot="5400000">
+            <a:off x="565035" y="4708359"/>
+            <a:ext cx="749116" cy="400110"/>
+          </a:xfrm>
+          <a:prstGeom prst="rect">
+            <a:avLst/>
+          </a:prstGeom>
+          <a:noFill/>
+        </p:spPr>
+        <p:txBody>
+          <a:bodyPr wrap="none" rtlCol="0">
+            <a:spAutoFit/>
+          </a:bodyPr>
+          <a:lstStyle/>
+          <a:p>
+            <a:r>
+              <a:rPr lang="en-US" sz="2000" b="1" dirty="0">
+                <a:latin typeface="Times New Roman" panose="02020603050405020304" pitchFamily="18" charset="0"/>
+                <a:cs typeface="Times New Roman" panose="02020603050405020304" pitchFamily="18" charset="0"/>
+              </a:rPr>
+              <a:t>Time</a:t>
+            </a:r>
+          </a:p>
+        </p:txBody>
+      </p:sp>
+      <p:cxnSp>
+        <p:nvCxnSpPr>
+          <p:cNvPr id="2" name="Straight Arrow Connector 1">
+            <a:extLst>
+              <a:ext uri="{FF2B5EF4-FFF2-40B4-BE49-F238E27FC236}">
+                <a16:creationId xmlns:a16="http://schemas.microsoft.com/office/drawing/2014/main" id="{E5E04ABD-3868-B52E-4FE5-BE72578AADC2}"/>
+              </a:ext>
+            </a:extLst>
+          </p:cNvPr>
+          <p:cNvCxnSpPr>
+            <a:cxnSpLocks/>
+          </p:cNvCxnSpPr>
+          <p:nvPr/>
+        </p:nvCxnSpPr>
+        <p:spPr>
+          <a:xfrm flipV="1">
+            <a:off x="2135528" y="2858396"/>
+            <a:ext cx="926167" cy="470135"/>
+          </a:xfrm>
+          <a:prstGeom prst="straightConnector1">
+            <a:avLst/>
+          </a:prstGeom>
+          <a:ln w="0">
+            <a:solidFill>
+              <a:schemeClr val="tx1"/>
+            </a:solidFill>
+            <a:headEnd type="triangle"/>
+            <a:tailEnd type="triangle"/>
+          </a:ln>
+        </p:spPr>
+        <p:style>
+          <a:lnRef idx="2">
+            <a:schemeClr val="accent1"/>
+          </a:lnRef>
+          <a:fillRef idx="0">
+            <a:schemeClr val="accent1"/>
+          </a:fillRef>
+          <a:effectRef idx="1">
+            <a:schemeClr val="accent1"/>
+          </a:effectRef>
+          <a:fontRef idx="minor">
+            <a:schemeClr val="tx1"/>
+          </a:fontRef>
+        </p:style>
+      </p:cxnSp>
+      <p:cxnSp>
+        <p:nvCxnSpPr>
+          <p:cNvPr id="5" name="Straight Arrow Connector 4">
+            <a:extLst>
+              <a:ext uri="{FF2B5EF4-FFF2-40B4-BE49-F238E27FC236}">
+                <a16:creationId xmlns:a16="http://schemas.microsoft.com/office/drawing/2014/main" id="{3B4633AB-1A65-AF1D-0082-858E7718DD01}"/>
+              </a:ext>
+            </a:extLst>
+          </p:cNvPr>
+          <p:cNvCxnSpPr>
+            <a:cxnSpLocks/>
+          </p:cNvCxnSpPr>
+          <p:nvPr/>
+        </p:nvCxnSpPr>
+        <p:spPr>
+          <a:xfrm flipV="1">
+            <a:off x="2135527" y="3416231"/>
+            <a:ext cx="917022" cy="40356"/>
+          </a:xfrm>
+          <a:prstGeom prst="straightConnector1">
+            <a:avLst/>
+          </a:prstGeom>
+          <a:ln w="0">
+            <a:solidFill>
+              <a:schemeClr val="tx1"/>
+            </a:solidFill>
+            <a:headEnd type="triangle"/>
+            <a:tailEnd type="triangle"/>
+          </a:ln>
+        </p:spPr>
+        <p:style>
+          <a:lnRef idx="2">
+            <a:schemeClr val="accent1"/>
+          </a:lnRef>
+          <a:fillRef idx="0">
+            <a:schemeClr val="accent1"/>
+          </a:fillRef>
+          <a:effectRef idx="1">
+            <a:schemeClr val="accent1"/>
+          </a:effectRef>
+          <a:fontRef idx="minor">
+            <a:schemeClr val="tx1"/>
+          </a:fontRef>
+        </p:style>
+      </p:cxnSp>
+      <p:cxnSp>
+        <p:nvCxnSpPr>
+          <p:cNvPr id="6" name="Straight Arrow Connector 5">
+            <a:extLst>
+              <a:ext uri="{FF2B5EF4-FFF2-40B4-BE49-F238E27FC236}">
+                <a16:creationId xmlns:a16="http://schemas.microsoft.com/office/drawing/2014/main" id="{41EC09BD-9AE4-E74D-38AC-CCB032A08F2E}"/>
+              </a:ext>
+            </a:extLst>
+          </p:cNvPr>
+          <p:cNvCxnSpPr>
+            <a:cxnSpLocks/>
+          </p:cNvCxnSpPr>
+          <p:nvPr/>
+        </p:nvCxnSpPr>
+        <p:spPr>
+          <a:xfrm flipV="1">
+            <a:off x="7931908" y="3135931"/>
+            <a:ext cx="627251" cy="785"/>
+          </a:xfrm>
+          <a:prstGeom prst="straightConnector1">
+            <a:avLst/>
+          </a:prstGeom>
+          <a:ln w="0">
+            <a:solidFill>
+              <a:schemeClr val="tx1"/>
+            </a:solidFill>
+            <a:headEnd type="triangle"/>
+            <a:tailEnd type="triangle"/>
+          </a:ln>
+        </p:spPr>
+        <p:style>
+          <a:lnRef idx="2">
+            <a:schemeClr val="accent1"/>
+          </a:lnRef>
+          <a:fillRef idx="0">
+            <a:schemeClr val="accent1"/>
+          </a:fillRef>
+          <a:effectRef idx="1">
+            <a:schemeClr val="accent1"/>
+          </a:effectRef>
+          <a:fontRef idx="minor">
+            <a:schemeClr val="tx1"/>
+          </a:fontRef>
+        </p:style>
+      </p:cxnSp>
+      <p:sp>
+        <p:nvSpPr>
+          <p:cNvPr id="7" name="TextBox 6">
+            <a:extLst>
+              <a:ext uri="{FF2B5EF4-FFF2-40B4-BE49-F238E27FC236}">
+                <a16:creationId xmlns:a16="http://schemas.microsoft.com/office/drawing/2014/main" id="{875BBB35-72FC-D5F3-90E7-B7E1C4F1D602}"/>
+              </a:ext>
+            </a:extLst>
+          </p:cNvPr>
+          <p:cNvSpPr txBox="1"/>
+          <p:nvPr/>
+        </p:nvSpPr>
+        <p:spPr>
+          <a:xfrm>
+            <a:off x="6699003" y="6554363"/>
+            <a:ext cx="870751" cy="707886"/>
+          </a:xfrm>
+          <a:prstGeom prst="rect">
+            <a:avLst/>
+          </a:prstGeom>
+          <a:solidFill>
+            <a:schemeClr val="bg2">
+              <a:lumMod val="90000"/>
+            </a:schemeClr>
+          </a:solidFill>
+          <a:ln>
+            <a:solidFill>
+              <a:schemeClr val="tx1"/>
+            </a:solidFill>
+          </a:ln>
+        </p:spPr>
+        <p:txBody>
+          <a:bodyPr wrap="none" rtlCol="0">
+            <a:spAutoFit/>
+          </a:bodyPr>
+          <a:lstStyle/>
+          <a:p>
+            <a:r>
+              <a:rPr lang="en-US" sz="4000" dirty="0"/>
+              <a:t>OR</a:t>
+            </a:r>
+          </a:p>
+        </p:txBody>
+      </p:sp>
+      <p:pic>
+        <p:nvPicPr>
+          <p:cNvPr id="12" name="Picture 11">
+            <a:extLst>
+              <a:ext uri="{FF2B5EF4-FFF2-40B4-BE49-F238E27FC236}">
+                <a16:creationId xmlns:a16="http://schemas.microsoft.com/office/drawing/2014/main" id="{C502CF49-A1AD-19B8-9A3D-C24EC838AB68}"/>
+              </a:ext>
+            </a:extLst>
+          </p:cNvPr>
+          <p:cNvPicPr>
+            <a:picLocks noChangeAspect="1"/>
+          </p:cNvPicPr>
+          <p:nvPr/>
+        </p:nvPicPr>
+        <p:blipFill>
+          <a:blip r:embed="rId5"/>
+          <a:stretch>
+            <a:fillRect/>
+          </a:stretch>
+        </p:blipFill>
+        <p:spPr>
+          <a:xfrm>
+            <a:off x="8001000" y="8036120"/>
+            <a:ext cx="870038" cy="893343"/>
+          </a:xfrm>
+          <a:prstGeom prst="rect">
+            <a:avLst/>
+          </a:prstGeom>
+        </p:spPr>
+      </p:pic>
+      <p:sp>
+        <p:nvSpPr>
+          <p:cNvPr id="16" name="Thought Bubble: Cloud 15">
+            <a:extLst>
+              <a:ext uri="{FF2B5EF4-FFF2-40B4-BE49-F238E27FC236}">
+                <a16:creationId xmlns:a16="http://schemas.microsoft.com/office/drawing/2014/main" id="{6AAED9C6-B2D0-FB70-CD7B-D2929124F337}"/>
               </a:ext>
             </a:extLst>
           </p:cNvPr>
@@ -5698,9 +6108,9 @@
           <p:nvPr/>
         </p:nvSpPr>
         <p:spPr>
-          <a:xfrm rot="2664760">
-            <a:off x="6710701" y="7184136"/>
-            <a:ext cx="2044148" cy="1621367"/>
+          <a:xfrm rot="1580350">
+            <a:off x="8181520" y="6730711"/>
+            <a:ext cx="3658597" cy="1892647"/>
           </a:xfrm>
           <a:prstGeom prst="cloudCallout">
             <a:avLst/>
@@ -5732,12 +6142,119 @@
           </a:p>
         </p:txBody>
       </p:sp>
-      <p:sp>
-        <p:nvSpPr>
-          <p:cNvPr id="121" name="TextBox 120">
-            <a:extLst>
-              <a:ext uri="{FF2B5EF4-FFF2-40B4-BE49-F238E27FC236}">
-                <a16:creationId xmlns:a16="http://schemas.microsoft.com/office/drawing/2014/main" id="{99AB9629-DF22-17FA-65A0-AEB2000F2B48}"/>
+      <p:pic>
+        <p:nvPicPr>
+          <p:cNvPr id="23" name="Picture 22">
+            <a:extLst>
+              <a:ext uri="{FF2B5EF4-FFF2-40B4-BE49-F238E27FC236}">
+                <a16:creationId xmlns:a16="http://schemas.microsoft.com/office/drawing/2014/main" id="{0D676998-27CE-6668-B097-869A5D87E375}"/>
+              </a:ext>
+            </a:extLst>
+          </p:cNvPr>
+          <p:cNvPicPr>
+            <a:picLocks/>
+          </p:cNvPicPr>
+          <p:nvPr/>
+        </p:nvPicPr>
+        <p:blipFill>
+          <a:blip r:embed="rId3"/>
+          <a:stretch>
+            <a:fillRect/>
+          </a:stretch>
+        </p:blipFill>
+        <p:spPr>
+          <a:xfrm>
+            <a:off x="8884686" y="7354668"/>
+            <a:ext cx="2502000" cy="338400"/>
+          </a:xfrm>
+          <a:prstGeom prst="rect">
+            <a:avLst/>
+          </a:prstGeom>
+        </p:spPr>
+      </p:pic>
+      <p:pic>
+        <p:nvPicPr>
+          <p:cNvPr id="26" name="Picture 25">
+            <a:extLst>
+              <a:ext uri="{FF2B5EF4-FFF2-40B4-BE49-F238E27FC236}">
+                <a16:creationId xmlns:a16="http://schemas.microsoft.com/office/drawing/2014/main" id="{214E2EC5-E097-8078-26B8-974F224134B9}"/>
+              </a:ext>
+            </a:extLst>
+          </p:cNvPr>
+          <p:cNvPicPr>
+            <a:picLocks noChangeAspect="1"/>
+          </p:cNvPicPr>
+          <p:nvPr/>
+        </p:nvPicPr>
+        <p:blipFill>
+          <a:blip r:embed="rId4"/>
+          <a:stretch>
+            <a:fillRect/>
+          </a:stretch>
+        </p:blipFill>
+        <p:spPr>
+          <a:xfrm>
+            <a:off x="8898962" y="7717727"/>
+            <a:ext cx="2500558" cy="339389"/>
+          </a:xfrm>
+          <a:prstGeom prst="rect">
+            <a:avLst/>
+          </a:prstGeom>
+        </p:spPr>
+      </p:pic>
+      <p:sp>
+        <p:nvSpPr>
+          <p:cNvPr id="31" name="Thought Bubble: Cloud 30">
+            <a:extLst>
+              <a:ext uri="{FF2B5EF4-FFF2-40B4-BE49-F238E27FC236}">
+                <a16:creationId xmlns:a16="http://schemas.microsoft.com/office/drawing/2014/main" id="{630EC7B3-56A4-33BC-AF3A-F87EA263F8DD}"/>
+              </a:ext>
+            </a:extLst>
+          </p:cNvPr>
+          <p:cNvSpPr/>
+          <p:nvPr/>
+        </p:nvSpPr>
+        <p:spPr>
+          <a:xfrm rot="1580350">
+            <a:off x="3354635" y="6779956"/>
+            <a:ext cx="3658597" cy="1892647"/>
+          </a:xfrm>
+          <a:prstGeom prst="cloudCallout">
+            <a:avLst/>
+          </a:prstGeom>
+          <a:noFill/>
+        </p:spPr>
+        <p:style>
+          <a:lnRef idx="2">
+            <a:schemeClr val="accent1">
+              <a:shade val="15000"/>
+            </a:schemeClr>
+          </a:lnRef>
+          <a:fillRef idx="1">
+            <a:schemeClr val="accent1"/>
+          </a:fillRef>
+          <a:effectRef idx="0">
+            <a:schemeClr val="accent1"/>
+          </a:effectRef>
+          <a:fontRef idx="minor">
+            <a:schemeClr val="lt1"/>
+          </a:fontRef>
+        </p:style>
+        <p:txBody>
+          <a:bodyPr rtlCol="0" anchor="ctr"/>
+          <a:lstStyle/>
+          <a:p>
+            <a:pPr algn="ctr"/>
+            <a:endParaRPr lang="en-US"/>
+          </a:p>
+        </p:txBody>
+      </p:sp>
+      <p:sp>
+        <p:nvSpPr>
+          <p:cNvPr id="14" name="TextBox 13">
+            <a:extLst>
+              <a:ext uri="{FF2B5EF4-FFF2-40B4-BE49-F238E27FC236}">
+                <a16:creationId xmlns:a16="http://schemas.microsoft.com/office/drawing/2014/main" id="{B801DB04-49C6-D350-2BC5-92BF5C60E28A}"/>
               </a:ext>
             </a:extLst>
           </p:cNvPr>
@@ -5746,13 +6263,15 @@
         </p:nvSpPr>
         <p:spPr>
           <a:xfrm>
-            <a:off x="-73692" y="-90007"/>
-            <a:ext cx="2078923" cy="707886"/>
+            <a:off x="964418" y="2524166"/>
+            <a:ext cx="517890" cy="369332"/>
           </a:xfrm>
           <a:prstGeom prst="rect">
             <a:avLst/>
           </a:prstGeom>
-          <a:noFill/>
+          <a:solidFill>
+            <a:schemeClr val="tx1"/>
+          </a:solidFill>
         </p:spPr>
         <p:txBody>
           <a:bodyPr wrap="square" rtlCol="0">
@@ -5760,22 +6279,26 @@
           </a:bodyPr>
           <a:lstStyle/>
           <a:p>
-            <a:r>
-              <a:rPr lang="en-US" sz="4000" dirty="0">
+            <a:pPr algn="ctr"/>
+            <a:r>
+              <a:rPr lang="en-US" b="1" dirty="0">
+                <a:solidFill>
+                  <a:schemeClr val="bg1"/>
+                </a:solidFill>
                 <a:latin typeface="Times New Roman" panose="02020603050405020304" pitchFamily="18" charset="0"/>
                 <a:cs typeface="Times New Roman" panose="02020603050405020304" pitchFamily="18" charset="0"/>
               </a:rPr>
-              <a:t>(A)</a:t>
-            </a:r>
-          </a:p>
-        </p:txBody>
-      </p:sp>
-      <p:sp>
-        <p:nvSpPr>
-          <p:cNvPr id="123" name="TextBox 122">
-            <a:extLst>
-              <a:ext uri="{FF2B5EF4-FFF2-40B4-BE49-F238E27FC236}">
-                <a16:creationId xmlns:a16="http://schemas.microsoft.com/office/drawing/2014/main" id="{8CA00D84-DE53-10BF-87BB-2224E52316F0}"/>
+              <a:t>T1</a:t>
+            </a:r>
+          </a:p>
+        </p:txBody>
+      </p:sp>
+      <p:sp>
+        <p:nvSpPr>
+          <p:cNvPr id="50" name="TextBox 49">
+            <a:extLst>
+              <a:ext uri="{FF2B5EF4-FFF2-40B4-BE49-F238E27FC236}">
+                <a16:creationId xmlns:a16="http://schemas.microsoft.com/office/drawing/2014/main" id="{C6E32503-3D6A-478E-1B02-F94ABE7C3F62}"/>
               </a:ext>
             </a:extLst>
           </p:cNvPr>
@@ -5784,13 +6307,15 @@
         </p:nvSpPr>
         <p:spPr>
           <a:xfrm>
-            <a:off x="-86249" y="2772017"/>
-            <a:ext cx="2078923" cy="707886"/>
+            <a:off x="956430" y="3830268"/>
+            <a:ext cx="517890" cy="369332"/>
           </a:xfrm>
           <a:prstGeom prst="rect">
             <a:avLst/>
           </a:prstGeom>
-          <a:noFill/>
+          <a:solidFill>
+            <a:schemeClr val="tx1"/>
+          </a:solidFill>
         </p:spPr>
         <p:txBody>
           <a:bodyPr wrap="square" rtlCol="0">
@@ -5798,22 +6323,26 @@
           </a:bodyPr>
           <a:lstStyle/>
           <a:p>
-            <a:r>
-              <a:rPr lang="en-US" sz="4000" dirty="0">
+            <a:pPr algn="ctr"/>
+            <a:r>
+              <a:rPr lang="en-US" b="1" dirty="0">
+                <a:solidFill>
+                  <a:schemeClr val="bg1"/>
+                </a:solidFill>
                 <a:latin typeface="Times New Roman" panose="02020603050405020304" pitchFamily="18" charset="0"/>
                 <a:cs typeface="Times New Roman" panose="02020603050405020304" pitchFamily="18" charset="0"/>
               </a:rPr>
-              <a:t>(B)</a:t>
-            </a:r>
-          </a:p>
-        </p:txBody>
-      </p:sp>
-      <p:sp>
-        <p:nvSpPr>
-          <p:cNvPr id="127" name="TextBox 126">
-            <a:extLst>
-              <a:ext uri="{FF2B5EF4-FFF2-40B4-BE49-F238E27FC236}">
-                <a16:creationId xmlns:a16="http://schemas.microsoft.com/office/drawing/2014/main" id="{7E8A405A-8294-FF79-22DA-E4479FE9C71C}"/>
+              <a:t>T2</a:t>
+            </a:r>
+          </a:p>
+        </p:txBody>
+      </p:sp>
+      <p:sp>
+        <p:nvSpPr>
+          <p:cNvPr id="53" name="TextBox 52">
+            <a:extLst>
+              <a:ext uri="{FF2B5EF4-FFF2-40B4-BE49-F238E27FC236}">
+                <a16:creationId xmlns:a16="http://schemas.microsoft.com/office/drawing/2014/main" id="{CA56C4D0-7F14-106A-F48A-952959D2963D}"/>
               </a:ext>
             </a:extLst>
           </p:cNvPr>
@@ -5822,13 +6351,15 @@
         </p:nvSpPr>
         <p:spPr>
           <a:xfrm>
-            <a:off x="-90262" y="6952489"/>
-            <a:ext cx="2078923" cy="707886"/>
+            <a:off x="952418" y="5354271"/>
+            <a:ext cx="517890" cy="369332"/>
           </a:xfrm>
           <a:prstGeom prst="rect">
             <a:avLst/>
           </a:prstGeom>
-          <a:noFill/>
+          <a:solidFill>
+            <a:schemeClr val="tx1"/>
+          </a:solidFill>
         </p:spPr>
         <p:txBody>
           <a:bodyPr wrap="square" rtlCol="0">
@@ -5836,95 +6367,16 @@
           </a:bodyPr>
           <a:lstStyle/>
           <a:p>
-            <a:r>
-              <a:rPr lang="en-US" sz="4000" dirty="0">
+            <a:pPr algn="ctr"/>
+            <a:r>
+              <a:rPr lang="en-US" b="1" dirty="0">
+                <a:solidFill>
+                  <a:schemeClr val="bg1"/>
+                </a:solidFill>
                 <a:latin typeface="Times New Roman" panose="02020603050405020304" pitchFamily="18" charset="0"/>
                 <a:cs typeface="Times New Roman" panose="02020603050405020304" pitchFamily="18" charset="0"/>
               </a:rPr>
-              <a:t>(C)</a:t>
-            </a:r>
-          </a:p>
-        </p:txBody>
-      </p:sp>
-      <p:cxnSp>
-        <p:nvCxnSpPr>
-          <p:cNvPr id="136" name="Straight Arrow Connector 135">
-            <a:extLst>
-              <a:ext uri="{FF2B5EF4-FFF2-40B4-BE49-F238E27FC236}">
-                <a16:creationId xmlns:a16="http://schemas.microsoft.com/office/drawing/2014/main" id="{343FFED4-E899-E374-4A2D-52023D419B3C}"/>
-              </a:ext>
-            </a:extLst>
-          </p:cNvPr>
-          <p:cNvCxnSpPr>
-            <a:cxnSpLocks/>
-            <a:endCxn id="127" idx="0"/>
-          </p:cNvCxnSpPr>
-          <p:nvPr/>
-        </p:nvCxnSpPr>
-        <p:spPr>
-          <a:xfrm flipH="1">
-            <a:off x="949200" y="2995375"/>
-            <a:ext cx="12649" cy="3957114"/>
-          </a:xfrm>
-          <a:prstGeom prst="straightConnector1">
-            <a:avLst/>
-          </a:prstGeom>
-          <a:ln w="28575">
-            <a:solidFill>
-              <a:schemeClr val="tx1"/>
-            </a:solidFill>
-            <a:tailEnd type="triangle"/>
-          </a:ln>
-        </p:spPr>
-        <p:style>
-          <a:lnRef idx="2">
-            <a:schemeClr val="accent1"/>
-          </a:lnRef>
-          <a:fillRef idx="0">
-            <a:schemeClr val="accent1"/>
-          </a:fillRef>
-          <a:effectRef idx="1">
-            <a:schemeClr val="accent1"/>
-          </a:effectRef>
-          <a:fontRef idx="minor">
-            <a:schemeClr val="tx1"/>
-          </a:fontRef>
-        </p:style>
-      </p:cxnSp>
-      <p:sp>
-        <p:nvSpPr>
-          <p:cNvPr id="139" name="TextBox 138">
-            <a:extLst>
-              <a:ext uri="{FF2B5EF4-FFF2-40B4-BE49-F238E27FC236}">
-                <a16:creationId xmlns:a16="http://schemas.microsoft.com/office/drawing/2014/main" id="{5BD3A7C3-7D1A-8704-BD39-4DB4579A4C7C}"/>
-              </a:ext>
-            </a:extLst>
-          </p:cNvPr>
-          <p:cNvSpPr txBox="1"/>
-          <p:nvPr/>
-        </p:nvSpPr>
-        <p:spPr>
-          <a:xfrm rot="5400000">
-            <a:off x="781606" y="4864772"/>
-            <a:ext cx="749116" cy="400110"/>
-          </a:xfrm>
-          <a:prstGeom prst="rect">
-            <a:avLst/>
-          </a:prstGeom>
-          <a:noFill/>
-        </p:spPr>
-        <p:txBody>
-          <a:bodyPr wrap="none" rtlCol="0">
-            <a:spAutoFit/>
-          </a:bodyPr>
-          <a:lstStyle/>
-          <a:p>
-            <a:r>
-              <a:rPr lang="en-US" sz="2000" b="1" dirty="0">
-                <a:latin typeface="Times New Roman" panose="02020603050405020304" pitchFamily="18" charset="0"/>
-                <a:cs typeface="Times New Roman" panose="02020603050405020304" pitchFamily="18" charset="0"/>
-              </a:rPr>
-              <a:t>Time</a:t>
+              <a:t>T3</a:t>
             </a:r>
           </a:p>
         </p:txBody>
